--- a/Proyecto_final_titanic/PPT/Proyecto_Titanic_Plantilla_Presentacion.pptx
+++ b/Proyecto_final_titanic/PPT/Proyecto_Titanic_Plantilla_Presentacion.pptx
@@ -4,6 +4,9 @@
   <p:sldMasterIdLst>
     <p:sldMasterId id="2147483648" r:id="rId1"/>
   </p:sldMasterIdLst>
+  <p:notesMasterIdLst>
+    <p:notesMasterId r:id="rId9"/>
+  </p:notesMasterIdLst>
   <p:sldIdLst>
     <p:sldId id="256" r:id="rId2"/>
     <p:sldId id="257" r:id="rId3"/>
@@ -13,9 +16,6 @@
     <p:sldId id="261" r:id="rId7"/>
     <p:sldId id="262" r:id="rId8"/>
   </p:sldIdLst>
-  <p:notesMasterIdLst>
-    <p:notesMasterId r:id="rId9"/>
-  </p:notesMasterIdLst>
   <p:sldSz cx="12192000" cy="6858000"/>
   <p:notesSz cx="6858000" cy="12192000"/>
   <p:defaultTextStyle>
@@ -110,6 +110,11 @@
       </a:defRPr>
     </a:lvl9pPr>
   </p:defaultTextStyle>
+  <p:extLst>
+    <p:ext uri="{EFAFB233-063F-42B5-8137-9DF3F51BA10A}">
+      <p15:sldGuideLst xmlns:p15="http://schemas.microsoft.com/office/powerpoint/2012/main"/>
+    </p:ext>
+  </p:extLst>
 </p:presentation>
 </file>
 
@@ -135,234 +140,10 @@
           <a:chExt cx="0" cy="0"/>
         </a:xfrm>
       </p:grpSpPr>
-      <p:sp>
-        <p:nvSpPr>
-          <p:cNvPr id="2" name="Header Placeholder 1"/>
-          <p:cNvSpPr>
-            <a:spLocks noGrp="1"/>
-          </p:cNvSpPr>
-          <p:nvPr>
-            <p:ph type="hdr" sz="quarter"/>
-          </p:nvPr>
-        </p:nvSpPr>
-        <p:spPr>
-          <a:xfrm>
-            <a:off x="0" y="0"/>
-            <a:ext cx="2971800" cy="458788"/>
-          </a:xfrm>
-          <a:prstGeom prst="rect">
-            <a:avLst/>
-          </a:prstGeom>
-        </p:spPr>
-        <p:txBody>
-          <a:bodyPr vert="horz" lIns="91440" tIns="45720" rIns="91440" bIns="45720" rtlCol="0"/>
-          <a:lstStyle>
-            <a:lvl1pPr algn="l">
-              <a:defRPr sz="1200"/>
-            </a:lvl1pPr>
-          </a:lstStyle>
-          <a:p>
-            <a:endParaRPr lang="en-US"/>
-          </a:p>
-        </p:txBody>
-      </p:sp>
-      <p:sp>
-        <p:nvSpPr>
-          <p:cNvPr id="3" name="Date Placeholder 2"/>
-          <p:cNvSpPr>
-            <a:spLocks noGrp="1"/>
-          </p:cNvSpPr>
-          <p:nvPr>
-            <p:ph type="dt" idx="1"/>
-          </p:nvPr>
-        </p:nvSpPr>
-        <p:spPr>
-          <a:xfrm>
-            <a:off x="3884613" y="0"/>
-            <a:ext cx="2971800" cy="458788"/>
-          </a:xfrm>
-          <a:prstGeom prst="rect">
-            <a:avLst/>
-          </a:prstGeom>
-        </p:spPr>
-        <p:txBody>
-          <a:bodyPr vert="horz" lIns="91440" tIns="45720" rIns="91440" bIns="45720" rtlCol="0"/>
-          <a:lstStyle>
-            <a:lvl1pPr algn="r">
-              <a:defRPr sz="1200"/>
-            </a:lvl1pPr>
-          </a:lstStyle>
-          <a:p>
-            <a:fld id="{5282F153-3F37-0F45-9E97-73ACFA13230C}" type="datetimeFigureOut">
-              <a:rPr lang="en-US"/>
-              <a:t>7/23/19</a:t>
-            </a:fld>
-            <a:endParaRPr lang="en-US"/>
-          </a:p>
-        </p:txBody>
-      </p:sp>
-      <p:sp>
-        <p:nvSpPr>
-          <p:cNvPr id="4" name="Slide Image Placeholder 3"/>
-          <p:cNvSpPr>
-            <a:spLocks noGrp="1" noRot="1" noChangeAspect="1"/>
-          </p:cNvSpPr>
-          <p:nvPr>
-            <p:ph type="sldImg" idx="2"/>
-          </p:nvPr>
-        </p:nvSpPr>
-        <p:spPr>
-          <a:xfrm>
-            <a:off x="685800" y="1143000"/>
-            <a:ext cx="5486400" cy="3086100"/>
-          </a:xfrm>
-          <a:prstGeom prst="rect">
-            <a:avLst/>
-          </a:prstGeom>
-          <a:noFill/>
-          <a:ln w="12700">
-            <a:solidFill>
-              <a:prstClr val="black"/>
-            </a:solidFill>
-          </a:ln>
-        </p:spPr>
-        <p:txBody>
-          <a:bodyPr vert="horz" lIns="91440" tIns="45720" rIns="91440" bIns="45720" rtlCol="0" anchor="ctr"/>
-          <a:lstStyle/>
-          <a:p>
-            <a:endParaRPr lang="en-US"/>
-          </a:p>
-        </p:txBody>
-      </p:sp>
-      <p:sp>
-        <p:nvSpPr>
-          <p:cNvPr id="5" name="Notes Placeholder 4"/>
-          <p:cNvSpPr>
-            <a:spLocks noGrp="1"/>
-          </p:cNvSpPr>
-          <p:nvPr>
-            <p:ph type="body" sz="quarter" idx="3"/>
-          </p:nvPr>
-        </p:nvSpPr>
-        <p:spPr>
-          <a:xfrm>
-            <a:off x="685800" y="4400550"/>
-            <a:ext cx="5486400" cy="3600450"/>
-          </a:xfrm>
-          <a:prstGeom prst="rect">
-            <a:avLst/>
-          </a:prstGeom>
-        </p:spPr>
-        <p:txBody>
-          <a:bodyPr vert="horz" lIns="91440" tIns="45720" rIns="91440" bIns="45720" rtlCol="0"/>
-          <a:lstStyle/>
-          <a:p>
-            <a:pPr lvl="0"/>
-            <a:r>
-              <a:rPr lang="en-US"/>
-              <a:t>Click to edit Master text styles</a:t>
-            </a:r>
-          </a:p>
-          <a:p>
-            <a:pPr lvl="1"/>
-            <a:r>
-              <a:rPr lang="en-US"/>
-              <a:t>Second level</a:t>
-            </a:r>
-          </a:p>
-          <a:p>
-            <a:pPr lvl="2"/>
-            <a:r>
-              <a:rPr lang="en-US"/>
-              <a:t>Third level</a:t>
-            </a:r>
-          </a:p>
-          <a:p>
-            <a:pPr lvl="3"/>
-            <a:r>
-              <a:rPr lang="en-US"/>
-              <a:t>Fourth level</a:t>
-            </a:r>
-          </a:p>
-          <a:p>
-            <a:pPr lvl="4"/>
-            <a:r>
-              <a:rPr lang="en-US"/>
-              <a:t>Fifth level</a:t>
-            </a:r>
-          </a:p>
-        </p:txBody>
-      </p:sp>
-      <p:sp>
-        <p:nvSpPr>
-          <p:cNvPr id="6" name="Footer Placeholder 5"/>
-          <p:cNvSpPr>
-            <a:spLocks noGrp="1"/>
-          </p:cNvSpPr>
-          <p:nvPr>
-            <p:ph type="ftr" sz="quarter" idx="4"/>
-          </p:nvPr>
-        </p:nvSpPr>
-        <p:spPr>
-          <a:xfrm>
-            <a:off x="0" y="8685213"/>
-            <a:ext cx="2971800" cy="458787"/>
-          </a:xfrm>
-          <a:prstGeom prst="rect">
-            <a:avLst/>
-          </a:prstGeom>
-        </p:spPr>
-        <p:txBody>
-          <a:bodyPr vert="horz" lIns="91440" tIns="45720" rIns="91440" bIns="45720" rtlCol="0" anchor="b"/>
-          <a:lstStyle>
-            <a:lvl1pPr algn="l">
-              <a:defRPr sz="1200"/>
-            </a:lvl1pPr>
-          </a:lstStyle>
-          <a:p>
-            <a:endParaRPr lang="en-US"/>
-          </a:p>
-        </p:txBody>
-      </p:sp>
-      <p:sp>
-        <p:nvSpPr>
-          <p:cNvPr id="7" name="Slide Number Placeholder 6"/>
-          <p:cNvSpPr>
-            <a:spLocks noGrp="1"/>
-          </p:cNvSpPr>
-          <p:nvPr>
-            <p:ph type="sldNum" sz="quarter" idx="5"/>
-          </p:nvPr>
-        </p:nvSpPr>
-        <p:spPr>
-          <a:xfrm>
-            <a:off x="3884613" y="8685213"/>
-            <a:ext cx="2971800" cy="458787"/>
-          </a:xfrm>
-          <a:prstGeom prst="rect">
-            <a:avLst/>
-          </a:prstGeom>
-        </p:spPr>
-        <p:txBody>
-          <a:bodyPr vert="horz" lIns="91440" tIns="45720" rIns="91440" bIns="45720" rtlCol="0" anchor="b"/>
-          <a:lstStyle>
-            <a:lvl1pPr algn="r">
-              <a:defRPr sz="1200"/>
-            </a:lvl1pPr>
-          </a:lstStyle>
-          <a:p>
-            <a:fld id="{CE5E9CC1-C706-0F49-92D6-E571CC5EEA8F}" type="slidenum">
-              <a:rPr lang="en-US"/>
-              <a:t>‹#›</a:t>
-            </a:fld>
-            <a:endParaRPr lang="en-US"/>
-          </a:p>
-        </p:txBody>
-      </p:sp>
     </p:spTree>
     <p:extLst>
       <p:ext uri="{BB962C8B-B14F-4D97-AF65-F5344CB8AC3E}">
-        <p14:creationId xmlns:p14="http://schemas.microsoft.com/office/powerpoint/2010/main" val="1024086991"/>
+        <p14:creationId xmlns:p14="http://schemas.microsoft.com/office/powerpoint/2010/main" val="2467110980"/>
       </p:ext>
     </p:extLst>
   </p:cSld>
@@ -510,7 +291,6 @@
               <a:rPr lang="en-US" dirty="0"/>
               <a:t>PARA EL ALUMNO: esta portada no cuenta dentro de las 5 slides. Pon los nombres y la fecha, y borra esta nota.</a:t>
             </a:r>
-            <a:endParaRPr lang="en-US" dirty="0"/>
           </a:p>
         </p:txBody>
       </p:sp>
@@ -598,7 +378,6 @@
               <a:rPr lang="en-US" dirty="0"/>
               <a:t>PARA EL ALUMNO: 30 segundos de exposición para esta slide. Es contexto, no hallazgos. No te extiendas.</a:t>
             </a:r>
-            <a:endParaRPr lang="en-US" dirty="0"/>
           </a:p>
         </p:txBody>
       </p:sp>
@@ -686,7 +465,6 @@
               <a:rPr lang="en-US" dirty="0"/>
               <a:t>PARA EL ALUMNO: 1 minuto. Si alguna hipótesis falló, dilo: es lo más interesante que puedes contar aquí.</a:t>
             </a:r>
-            <a:endParaRPr lang="en-US" dirty="0"/>
           </a:p>
         </p:txBody>
       </p:sp>
@@ -774,7 +552,6 @@
               <a:rPr lang="en-US" dirty="0"/>
               <a:t>PARA EL ALUMNO: 2 minutos, es la slide más densa. Recorre la tabla de arriba abajo señalando dónde están los saltos grandes y dónde no pasa nada.</a:t>
             </a:r>
-            <a:endParaRPr lang="en-US" dirty="0"/>
           </a:p>
         </p:txBody>
       </p:sp>
@@ -862,7 +639,6 @@
               <a:rPr lang="en-US" dirty="0"/>
               <a:t>PARA EL ALUMNO: 2 minutos y medio, la mitad de tu tiempo. No leas la tabla: cuenta la historia. 'Esperábamos X, encontramos Y, y creemos que pasa porque Z.'</a:t>
             </a:r>
-            <a:endParaRPr lang="en-US" dirty="0"/>
           </a:p>
         </p:txBody>
       </p:sp>
@@ -950,7 +726,6 @@
               <a:rPr lang="en-US" dirty="0"/>
               <a:t>PARA EL ALUMNO: 1 minuto. Cierra con las limitaciones, no con el umbral: deja al público con la impresión de que sabes hasta dónde llegan tus datos. Eso da más credibilidad que cualquier métrica.</a:t>
             </a:r>
-            <a:endParaRPr lang="en-US" dirty="0"/>
           </a:p>
         </p:txBody>
       </p:sp>
@@ -1034,10 +809,6 @@
           <a:bodyPr/>
           <a:lstStyle/>
           <a:p>
-            <a:r>
-              <a:rPr lang="en-US" dirty="0"/>
-              <a:t/>
-            </a:r>
             <a:endParaRPr lang="en-US" dirty="0"/>
           </a:p>
         </p:txBody>
@@ -1111,6 +882,11 @@
 <file path=ppt/slideMasters/slideMaster1.xml><?xml version="1.0" encoding="utf-8"?>
 <p:sldMaster xmlns:a="http://schemas.openxmlformats.org/drawingml/2006/main" xmlns:r="http://schemas.openxmlformats.org/officeDocument/2006/relationships" xmlns:p="http://schemas.openxmlformats.org/presentationml/2006/main">
   <p:cSld>
+    <p:bg>
+      <p:bgRef idx="1001">
+        <a:schemeClr val="bg1"/>
+      </p:bgRef>
+    </p:bg>
     <p:spTree>
       <p:nvGrpSpPr>
         <p:cNvPr id="1" name=""/>
@@ -1393,6 +1169,7 @@
         <a:solidFill>
           <a:srgbClr val="0A2559"/>
         </a:solidFill>
+        <a:effectLst/>
       </p:bgPr>
     </p:bg>
     <p:spTree>
@@ -1457,11 +1234,11 @@
           <a:bodyPr wrap="square" lIns="0" tIns="0" rIns="0" bIns="0" rtlCol="0" anchor="ctr"/>
           <a:lstStyle/>
           <a:p>
-            <a:pPr algn="ctr" indent="0" marL="0">
+            <a:pPr marL="0" indent="0" algn="ctr">
               <a:buNone/>
             </a:pPr>
             <a:r>
-              <a:rPr lang="en-US" sz="1150" b="1" spc="100" kern="0" dirty="0">
+              <a:rPr lang="en-US" sz="1150" b="1" kern="0" spc="100" dirty="0">
                 <a:solidFill>
                   <a:srgbClr val="FFFFFF"/>
                 </a:solidFill>
@@ -1496,7 +1273,7 @@
           <a:bodyPr wrap="square" lIns="0" tIns="0" rIns="0" bIns="0" rtlCol="0" anchor="t"/>
           <a:lstStyle/>
           <a:p>
-            <a:pPr indent="0" marL="0">
+            <a:pPr marL="0" indent="0">
               <a:lnSpc>
                 <a:spcPct val="98000"/>
               </a:lnSpc>
@@ -1516,7 +1293,7 @@
             <a:endParaRPr lang="en-US" sz="4200" dirty="0"/>
           </a:p>
           <a:p>
-            <a:pPr indent="0" marL="0">
+            <a:pPr marL="0" indent="0">
               <a:lnSpc>
                 <a:spcPct val="98000"/>
               </a:lnSpc>
@@ -1585,7 +1362,7 @@
           <a:bodyPr wrap="square" lIns="0" tIns="0" rIns="0" bIns="0" rtlCol="0" anchor="ctr"/>
           <a:lstStyle/>
           <a:p>
-            <a:pPr algn="ctr" indent="0" marL="0">
+            <a:pPr marL="0" indent="0" algn="ctr">
               <a:lnSpc>
                 <a:spcPct val="114000"/>
               </a:lnSpc>
@@ -1654,7 +1431,7 @@
           <a:bodyPr wrap="square" lIns="0" tIns="0" rIns="0" bIns="0" rtlCol="0" anchor="ctr"/>
           <a:lstStyle/>
           <a:p>
-            <a:pPr algn="ctr" indent="0" marL="0">
+            <a:pPr marL="0" indent="0" algn="ctr">
               <a:lnSpc>
                 <a:spcPct val="114000"/>
               </a:lnSpc>
@@ -1696,7 +1473,7 @@
           <a:bodyPr wrap="square" lIns="0" tIns="0" rIns="0" bIns="0" rtlCol="0" anchor="ctr"/>
           <a:lstStyle/>
           <a:p>
-            <a:pPr indent="0" marL="0">
+            <a:pPr marL="0" indent="0">
               <a:buNone/>
             </a:pPr>
             <a:r>
@@ -1730,6 +1507,7 @@
         <a:solidFill>
           <a:srgbClr val="F5F7FB"/>
         </a:solidFill>
+        <a:effectLst/>
       </p:bgPr>
     </p:bg>
     <p:spTree>
@@ -1794,11 +1572,11 @@
           <a:bodyPr wrap="square" lIns="0" tIns="0" rIns="0" bIns="0" rtlCol="0" anchor="ctr"/>
           <a:lstStyle/>
           <a:p>
-            <a:pPr algn="ctr" indent="0" marL="0">
+            <a:pPr marL="0" indent="0" algn="ctr">
               <a:buNone/>
             </a:pPr>
             <a:r>
-              <a:rPr lang="en-US" sz="1150" b="1" spc="100" kern="0" dirty="0">
+              <a:rPr lang="en-US" sz="1150" b="1" kern="0" spc="100" dirty="0">
                 <a:solidFill>
                   <a:srgbClr val="FFFFFF"/>
                 </a:solidFill>
@@ -1833,7 +1611,7 @@
           <a:bodyPr wrap="square" lIns="0" tIns="0" rIns="0" bIns="0" rtlCol="0" anchor="ctr"/>
           <a:lstStyle/>
           <a:p>
-            <a:pPr indent="0" marL="0">
+            <a:pPr marL="0" indent="0">
               <a:buNone/>
             </a:pPr>
             <a:r>
@@ -1872,7 +1650,7 @@
           <a:bodyPr wrap="square" lIns="0" tIns="0" rIns="0" bIns="0" rtlCol="0" anchor="ctr"/>
           <a:lstStyle/>
           <a:p>
-            <a:pPr indent="0" marL="0">
+            <a:pPr marL="0" indent="0">
               <a:buNone/>
             </a:pPr>
             <a:r>
@@ -1938,7 +1716,7 @@
           <a:bodyPr wrap="square" lIns="0" tIns="0" rIns="0" bIns="0" rtlCol="0" anchor="ctr"/>
           <a:lstStyle/>
           <a:p>
-            <a:pPr indent="0" marL="0">
+            <a:pPr marL="0" indent="0">
               <a:buNone/>
             </a:pPr>
             <a:r>
@@ -2004,7 +1782,7 @@
           <a:bodyPr wrap="square" lIns="0" tIns="0" rIns="0" bIns="0" rtlCol="0" anchor="ctr"/>
           <a:lstStyle/>
           <a:p>
-            <a:pPr algn="l" indent="0" marL="0">
+            <a:pPr marL="0" indent="0" algn="l">
               <a:lnSpc>
                 <a:spcPct val="114000"/>
               </a:lnSpc>
@@ -2024,7 +1802,7 @@
             <a:endParaRPr lang="en-US" sz="1100" dirty="0"/>
           </a:p>
           <a:p>
-            <a:pPr algn="l" indent="0" marL="0">
+            <a:pPr marL="0" indent="0" algn="l">
               <a:lnSpc>
                 <a:spcPct val="114000"/>
               </a:lnSpc>
@@ -2093,7 +1871,7 @@
           <a:bodyPr wrap="square" lIns="0" tIns="0" rIns="0" bIns="0" rtlCol="0" anchor="ctr"/>
           <a:lstStyle/>
           <a:p>
-            <a:pPr indent="0" marL="0">
+            <a:pPr marL="0" indent="0">
               <a:buNone/>
             </a:pPr>
             <a:r>
@@ -2159,7 +1937,7 @@
           <a:bodyPr wrap="square" lIns="0" tIns="0" rIns="0" bIns="0" rtlCol="0" anchor="ctr"/>
           <a:lstStyle/>
           <a:p>
-            <a:pPr algn="l" indent="0" marL="0">
+            <a:pPr marL="0" indent="0" algn="l">
               <a:lnSpc>
                 <a:spcPct val="114000"/>
               </a:lnSpc>
@@ -2179,7 +1957,7 @@
             <a:endParaRPr lang="en-US" sz="1100" dirty="0"/>
           </a:p>
           <a:p>
-            <a:pPr algn="l" indent="0" marL="0">
+            <a:pPr marL="0" indent="0" algn="l">
               <a:lnSpc>
                 <a:spcPct val="114000"/>
               </a:lnSpc>
@@ -2248,7 +2026,7 @@
           <a:bodyPr wrap="square" lIns="0" tIns="0" rIns="0" bIns="0" rtlCol="0" anchor="ctr"/>
           <a:lstStyle/>
           <a:p>
-            <a:pPr indent="0" marL="0">
+            <a:pPr marL="0" indent="0">
               <a:buNone/>
             </a:pPr>
             <a:r>
@@ -2314,7 +2092,7 @@
           <a:bodyPr wrap="square" lIns="0" tIns="0" rIns="0" bIns="0" rtlCol="0" anchor="ctr"/>
           <a:lstStyle/>
           <a:p>
-            <a:pPr algn="l" indent="0" marL="0">
+            <a:pPr marL="0" indent="0" algn="l">
               <a:lnSpc>
                 <a:spcPct val="114000"/>
               </a:lnSpc>
@@ -2334,7 +2112,7 @@
             <a:endParaRPr lang="en-US" sz="1100" dirty="0"/>
           </a:p>
           <a:p>
-            <a:pPr algn="l" indent="0" marL="0">
+            <a:pPr marL="0" indent="0" algn="l">
               <a:lnSpc>
                 <a:spcPct val="114000"/>
               </a:lnSpc>
@@ -2430,7 +2208,7 @@
           <a:bodyPr wrap="square" lIns="0" tIns="0" rIns="0" bIns="0" rtlCol="0" anchor="ctr"/>
           <a:lstStyle/>
           <a:p>
-            <a:pPr indent="0" marL="0">
+            <a:pPr marL="0" indent="0">
               <a:buNone/>
             </a:pPr>
             <a:r>
@@ -2469,7 +2247,7 @@
           <a:bodyPr wrap="square" lIns="0" tIns="0" rIns="0" bIns="0" rtlCol="0" anchor="t"/>
           <a:lstStyle/>
           <a:p>
-            <a:pPr algn="l" indent="0" marL="0">
+            <a:pPr marL="0" indent="0" algn="l">
               <a:lnSpc>
                 <a:spcPct val="108000"/>
               </a:lnSpc>
@@ -2506,6 +2284,7 @@
         <a:solidFill>
           <a:srgbClr val="F5F7FB"/>
         </a:solidFill>
+        <a:effectLst/>
       </p:bgPr>
     </p:bg>
     <p:spTree>
@@ -2570,11 +2349,11 @@
           <a:bodyPr wrap="square" lIns="0" tIns="0" rIns="0" bIns="0" rtlCol="0" anchor="ctr"/>
           <a:lstStyle/>
           <a:p>
-            <a:pPr algn="ctr" indent="0" marL="0">
+            <a:pPr marL="0" indent="0" algn="ctr">
               <a:buNone/>
             </a:pPr>
             <a:r>
-              <a:rPr lang="en-US" sz="1150" b="1" spc="100" kern="0" dirty="0">
+              <a:rPr lang="en-US" sz="1150" b="1" kern="0" spc="100" dirty="0">
                 <a:solidFill>
                   <a:srgbClr val="FFFFFF"/>
                 </a:solidFill>
@@ -2609,7 +2388,7 @@
           <a:bodyPr wrap="square" lIns="0" tIns="0" rIns="0" bIns="0" rtlCol="0" anchor="ctr"/>
           <a:lstStyle/>
           <a:p>
-            <a:pPr indent="0" marL="0">
+            <a:pPr marL="0" indent="0">
               <a:buNone/>
             </a:pPr>
             <a:r>
@@ -2648,7 +2427,7 @@
           <a:bodyPr wrap="square" lIns="0" tIns="0" rIns="0" bIns="0" rtlCol="0" anchor="ctr"/>
           <a:lstStyle/>
           <a:p>
-            <a:pPr indent="0" marL="0">
+            <a:pPr marL="0" indent="0">
               <a:buNone/>
             </a:pPr>
             <a:r>
@@ -2714,7 +2493,7 @@
           <a:bodyPr wrap="square" lIns="0" tIns="0" rIns="0" bIns="0" rtlCol="0" anchor="ctr"/>
           <a:lstStyle/>
           <a:p>
-            <a:pPr indent="0" marL="0">
+            <a:pPr marL="0" indent="0">
               <a:buNone/>
             </a:pPr>
             <a:r>
@@ -2780,7 +2559,7 @@
           <a:bodyPr wrap="square" lIns="0" tIns="0" rIns="0" bIns="0" rtlCol="0" anchor="ctr"/>
           <a:lstStyle/>
           <a:p>
-            <a:pPr algn="l" indent="0" marL="0">
+            <a:pPr marL="0" indent="0" algn="l">
               <a:lnSpc>
                 <a:spcPct val="114000"/>
               </a:lnSpc>
@@ -2849,7 +2628,7 @@
           <a:bodyPr wrap="square" lIns="0" tIns="0" rIns="0" bIns="0" rtlCol="0" anchor="ctr"/>
           <a:lstStyle/>
           <a:p>
-            <a:pPr algn="ctr" indent="0" marL="0">
+            <a:pPr marL="0" indent="0" algn="ctr">
               <a:lnSpc>
                 <a:spcPct val="114000"/>
               </a:lnSpc>
@@ -2918,7 +2697,7 @@
           <a:bodyPr wrap="square" lIns="0" tIns="0" rIns="0" bIns="0" rtlCol="0" anchor="ctr"/>
           <a:lstStyle/>
           <a:p>
-            <a:pPr indent="0" marL="0">
+            <a:pPr marL="0" indent="0">
               <a:buNone/>
             </a:pPr>
             <a:r>
@@ -2984,7 +2763,7 @@
           <a:bodyPr wrap="square" lIns="0" tIns="0" rIns="0" bIns="0" rtlCol="0" anchor="ctr"/>
           <a:lstStyle/>
           <a:p>
-            <a:pPr algn="l" indent="0" marL="0">
+            <a:pPr marL="0" indent="0" algn="l">
               <a:lnSpc>
                 <a:spcPct val="114000"/>
               </a:lnSpc>
@@ -3053,7 +2832,7 @@
           <a:bodyPr wrap="square" lIns="0" tIns="0" rIns="0" bIns="0" rtlCol="0" anchor="ctr"/>
           <a:lstStyle/>
           <a:p>
-            <a:pPr algn="ctr" indent="0" marL="0">
+            <a:pPr marL="0" indent="0" algn="ctr">
               <a:lnSpc>
                 <a:spcPct val="114000"/>
               </a:lnSpc>
@@ -3122,7 +2901,7 @@
           <a:bodyPr wrap="square" lIns="0" tIns="0" rIns="0" bIns="0" rtlCol="0" anchor="ctr"/>
           <a:lstStyle/>
           <a:p>
-            <a:pPr indent="0" marL="0">
+            <a:pPr marL="0" indent="0">
               <a:buNone/>
             </a:pPr>
             <a:r>
@@ -3188,7 +2967,7 @@
           <a:bodyPr wrap="square" lIns="0" tIns="0" rIns="0" bIns="0" rtlCol="0" anchor="ctr"/>
           <a:lstStyle/>
           <a:p>
-            <a:pPr algn="l" indent="0" marL="0">
+            <a:pPr marL="0" indent="0" algn="l">
               <a:lnSpc>
                 <a:spcPct val="114000"/>
               </a:lnSpc>
@@ -3257,7 +3036,7 @@
           <a:bodyPr wrap="square" lIns="0" tIns="0" rIns="0" bIns="0" rtlCol="0" anchor="ctr"/>
           <a:lstStyle/>
           <a:p>
-            <a:pPr algn="ctr" indent="0" marL="0">
+            <a:pPr marL="0" indent="0" algn="ctr">
               <a:lnSpc>
                 <a:spcPct val="114000"/>
               </a:lnSpc>
@@ -3353,7 +3132,7 @@
           <a:bodyPr wrap="square" lIns="0" tIns="0" rIns="0" bIns="0" rtlCol="0" anchor="ctr"/>
           <a:lstStyle/>
           <a:p>
-            <a:pPr indent="0" marL="0">
+            <a:pPr marL="0" indent="0">
               <a:buNone/>
             </a:pPr>
             <a:r>
@@ -3419,7 +3198,7 @@
           <a:bodyPr wrap="square" lIns="0" tIns="0" rIns="0" bIns="0" rtlCol="0" anchor="ctr"/>
           <a:lstStyle/>
           <a:p>
-            <a:pPr algn="ctr" indent="0" marL="0">
+            <a:pPr marL="0" indent="0" algn="ctr">
               <a:lnSpc>
                 <a:spcPct val="114000"/>
               </a:lnSpc>
@@ -3439,7 +3218,7 @@
             <a:endParaRPr lang="en-US" sz="1100" dirty="0"/>
           </a:p>
           <a:p>
-            <a:pPr algn="ctr" indent="0" marL="0">
+            <a:pPr marL="0" indent="0" algn="ctr">
               <a:lnSpc>
                 <a:spcPct val="114000"/>
               </a:lnSpc>
@@ -3459,7 +3238,7 @@
             <a:endParaRPr lang="en-US" sz="1100" dirty="0"/>
           </a:p>
           <a:p>
-            <a:pPr algn="ctr" indent="0" marL="0">
+            <a:pPr marL="0" indent="0" algn="ctr">
               <a:lnSpc>
                 <a:spcPct val="114000"/>
               </a:lnSpc>
@@ -3479,7 +3258,7 @@
             <a:endParaRPr lang="en-US" sz="1100" dirty="0"/>
           </a:p>
           <a:p>
-            <a:pPr algn="ctr" indent="0" marL="0">
+            <a:pPr marL="0" indent="0" algn="ctr">
               <a:lnSpc>
                 <a:spcPct val="114000"/>
               </a:lnSpc>
@@ -3488,7 +3267,7 @@
             <a:endParaRPr lang="en-US" sz="1100" dirty="0"/>
           </a:p>
           <a:p>
-            <a:pPr algn="ctr" indent="0" marL="0">
+            <a:pPr marL="0" indent="0" algn="ctr">
               <a:lnSpc>
                 <a:spcPct val="114000"/>
               </a:lnSpc>
@@ -3584,7 +3363,7 @@
           <a:bodyPr wrap="square" lIns="0" tIns="0" rIns="0" bIns="0" rtlCol="0" anchor="ctr"/>
           <a:lstStyle/>
           <a:p>
-            <a:pPr indent="0" marL="0">
+            <a:pPr marL="0" indent="0">
               <a:buNone/>
             </a:pPr>
             <a:r>
@@ -3623,7 +3402,7 @@
           <a:bodyPr wrap="square" lIns="0" tIns="0" rIns="0" bIns="0" rtlCol="0" anchor="t"/>
           <a:lstStyle/>
           <a:p>
-            <a:pPr algn="l" indent="0" marL="0">
+            <a:pPr marL="0" indent="0" algn="l">
               <a:lnSpc>
                 <a:spcPct val="108000"/>
               </a:lnSpc>
@@ -3660,6 +3439,7 @@
         <a:solidFill>
           <a:srgbClr val="F5F7FB"/>
         </a:solidFill>
+        <a:effectLst/>
       </p:bgPr>
     </p:bg>
     <p:spTree>
@@ -3724,11 +3504,11 @@
           <a:bodyPr wrap="square" lIns="0" tIns="0" rIns="0" bIns="0" rtlCol="0" anchor="ctr"/>
           <a:lstStyle/>
           <a:p>
-            <a:pPr algn="ctr" indent="0" marL="0">
+            <a:pPr marL="0" indent="0" algn="ctr">
               <a:buNone/>
             </a:pPr>
             <a:r>
-              <a:rPr lang="en-US" sz="1150" b="1" spc="100" kern="0" dirty="0">
+              <a:rPr lang="en-US" sz="1150" b="1" kern="0" spc="100" dirty="0">
                 <a:solidFill>
                   <a:srgbClr val="FFFFFF"/>
                 </a:solidFill>
@@ -3763,7 +3543,7 @@
           <a:bodyPr wrap="square" lIns="0" tIns="0" rIns="0" bIns="0" rtlCol="0" anchor="ctr"/>
           <a:lstStyle/>
           <a:p>
-            <a:pPr indent="0" marL="0">
+            <a:pPr marL="0" indent="0">
               <a:buNone/>
             </a:pPr>
             <a:r>
@@ -3802,7 +3582,7 @@
           <a:bodyPr wrap="square" lIns="0" tIns="0" rIns="0" bIns="0" rtlCol="0" anchor="ctr"/>
           <a:lstStyle/>
           <a:p>
-            <a:pPr indent="0" marL="0">
+            <a:pPr marL="0" indent="0">
               <a:buNone/>
             </a:pPr>
             <a:r>
@@ -3822,7 +3602,7 @@
       </p:sp>
       <p:graphicFrame>
         <p:nvGraphicFramePr>
-          <p:cNvPr id="5" name="Table 0"/>
+          <p:cNvPr id="6" name="Table 0"/>
           <p:cNvGraphicFramePr>
             <a:graphicFrameLocks noGrp="1"/>
           </p:cNvGraphicFramePr>
@@ -3843,10 +3623,34 @@
             <a:tbl>
               <a:tblPr/>
               <a:tblGrid>
-                <a:gridCol w="1097280"/>
-                <a:gridCol w="2743200"/>
-                <a:gridCol w="1645920"/>
-                <a:gridCol w="1463040"/>
+                <a:gridCol w="1097280">
+                  <a:extLst>
+                    <a:ext uri="{9D8B030D-6E8A-4147-A177-3AD203B41FA5}">
+                      <a16:colId xmlns:a16="http://schemas.microsoft.com/office/drawing/2014/main" val="20000"/>
+                    </a:ext>
+                  </a:extLst>
+                </a:gridCol>
+                <a:gridCol w="2743200">
+                  <a:extLst>
+                    <a:ext uri="{9D8B030D-6E8A-4147-A177-3AD203B41FA5}">
+                      <a16:colId xmlns:a16="http://schemas.microsoft.com/office/drawing/2014/main" val="20001"/>
+                    </a:ext>
+                  </a:extLst>
+                </a:gridCol>
+                <a:gridCol w="1645920">
+                  <a:extLst>
+                    <a:ext uri="{9D8B030D-6E8A-4147-A177-3AD203B41FA5}">
+                      <a16:colId xmlns:a16="http://schemas.microsoft.com/office/drawing/2014/main" val="20002"/>
+                    </a:ext>
+                  </a:extLst>
+                </a:gridCol>
+                <a:gridCol w="1463040">
+                  <a:extLst>
+                    <a:ext uri="{9D8B030D-6E8A-4147-A177-3AD203B41FA5}">
+                      <a16:colId xmlns:a16="http://schemas.microsoft.com/office/drawing/2014/main" val="20003"/>
+                    </a:ext>
+                  </a:extLst>
+                </a:gridCol>
               </a:tblGrid>
               <a:tr h="402336">
                 <a:tc>
@@ -3854,7 +3658,7 @@
                     <a:bodyPr/>
                     <a:lstStyle/>
                     <a:p>
-                      <a:pPr indent="0" marL="0">
+                      <a:pPr marL="0" indent="0">
                         <a:buNone/>
                       </a:pPr>
                       <a:r>
@@ -3922,7 +3726,7 @@
                     <a:bodyPr/>
                     <a:lstStyle/>
                     <a:p>
-                      <a:pPr indent="0" marL="0">
+                      <a:pPr marL="0" indent="0">
                         <a:buNone/>
                       </a:pPr>
                       <a:r>
@@ -3990,7 +3794,7 @@
                     <a:bodyPr/>
                     <a:lstStyle/>
                     <a:p>
-                      <a:pPr indent="0" marL="0">
+                      <a:pPr marL="0" indent="0">
                         <a:buNone/>
                       </a:pPr>
                       <a:r>
@@ -4058,7 +3862,7 @@
                     <a:bodyPr/>
                     <a:lstStyle/>
                     <a:p>
-                      <a:pPr indent="0" marL="0">
+                      <a:pPr marL="0" indent="0">
                         <a:buNone/>
                       </a:pPr>
                       <a:r>
@@ -4121,6 +3925,11 @@
                     </a:solidFill>
                   </a:tcPr>
                 </a:tc>
+                <a:extLst>
+                  <a:ext uri="{0D108BD9-81ED-4DB2-BD59-A6C34878D82A}">
+                    <a16:rowId xmlns:a16="http://schemas.microsoft.com/office/drawing/2014/main" val="10000"/>
+                  </a:ext>
+                </a:extLst>
               </a:tr>
               <a:tr h="402336">
                 <a:tc>
@@ -4128,7 +3937,7 @@
                     <a:bodyPr/>
                     <a:lstStyle/>
                     <a:p>
-                      <a:pPr algn="ctr" indent="0" marL="0">
+                      <a:pPr marL="0" indent="0" algn="ctr">
                         <a:buNone/>
                       </a:pPr>
                       <a:r>
@@ -4196,7 +4005,7 @@
                     <a:bodyPr/>
                     <a:lstStyle/>
                     <a:p>
-                      <a:pPr indent="0" marL="0">
+                      <a:pPr marL="0" indent="0">
                         <a:buNone/>
                       </a:pPr>
                       <a:r>
@@ -4264,7 +4073,7 @@
                     <a:bodyPr/>
                     <a:lstStyle/>
                     <a:p>
-                      <a:pPr algn="ctr" indent="0" marL="0">
+                      <a:pPr marL="0" indent="0" algn="ctr">
                         <a:buNone/>
                       </a:pPr>
                       <a:r>
@@ -4332,7 +4141,7 @@
                     <a:bodyPr/>
                     <a:lstStyle/>
                     <a:p>
-                      <a:pPr algn="ctr" indent="0" marL="0">
+                      <a:pPr marL="0" indent="0" algn="ctr">
                         <a:buNone/>
                       </a:pPr>
                       <a:r>
@@ -4395,6 +4204,11 @@
                     </a:solidFill>
                   </a:tcPr>
                 </a:tc>
+                <a:extLst>
+                  <a:ext uri="{0D108BD9-81ED-4DB2-BD59-A6C34878D82A}">
+                    <a16:rowId xmlns:a16="http://schemas.microsoft.com/office/drawing/2014/main" val="10001"/>
+                  </a:ext>
+                </a:extLst>
               </a:tr>
               <a:tr h="402336">
                 <a:tc>
@@ -4402,7 +4216,7 @@
                     <a:bodyPr/>
                     <a:lstStyle/>
                     <a:p>
-                      <a:pPr algn="ctr" indent="0" marL="0">
+                      <a:pPr marL="0" indent="0" algn="ctr">
                         <a:buNone/>
                       </a:pPr>
                       <a:r>
@@ -4470,7 +4284,7 @@
                     <a:bodyPr/>
                     <a:lstStyle/>
                     <a:p>
-                      <a:pPr algn="ctr" indent="0" marL="0">
+                      <a:pPr marL="0" indent="0" algn="ctr">
                         <a:buNone/>
                       </a:pPr>
                       <a:endParaRPr lang="en-US" sz="1150" dirty="0">
@@ -4527,7 +4341,7 @@
                     <a:bodyPr/>
                     <a:lstStyle/>
                     <a:p>
-                      <a:pPr algn="ctr" indent="0" marL="0">
+                      <a:pPr marL="0" indent="0" algn="ctr">
                         <a:buNone/>
                       </a:pPr>
                       <a:endParaRPr lang="en-US" sz="1150" dirty="0">
@@ -4584,7 +4398,7 @@
                     <a:bodyPr/>
                     <a:lstStyle/>
                     <a:p>
-                      <a:pPr algn="ctr" indent="0" marL="0">
+                      <a:pPr marL="0" indent="0" algn="ctr">
                         <a:buNone/>
                       </a:pPr>
                       <a:endParaRPr lang="en-US" sz="1150" dirty="0">
@@ -4636,6 +4450,11 @@
                     </a:solidFill>
                   </a:tcPr>
                 </a:tc>
+                <a:extLst>
+                  <a:ext uri="{0D108BD9-81ED-4DB2-BD59-A6C34878D82A}">
+                    <a16:rowId xmlns:a16="http://schemas.microsoft.com/office/drawing/2014/main" val="10002"/>
+                  </a:ext>
+                </a:extLst>
               </a:tr>
               <a:tr h="402336">
                 <a:tc>
@@ -4643,7 +4462,7 @@
                     <a:bodyPr/>
                     <a:lstStyle/>
                     <a:p>
-                      <a:pPr algn="ctr" indent="0" marL="0">
+                      <a:pPr marL="0" indent="0" algn="ctr">
                         <a:buNone/>
                       </a:pPr>
                       <a:r>
@@ -4711,7 +4530,7 @@
                     <a:bodyPr/>
                     <a:lstStyle/>
                     <a:p>
-                      <a:pPr algn="ctr" indent="0" marL="0">
+                      <a:pPr marL="0" indent="0" algn="ctr">
                         <a:buNone/>
                       </a:pPr>
                       <a:endParaRPr lang="en-US" sz="1150" dirty="0">
@@ -4768,7 +4587,7 @@
                     <a:bodyPr/>
                     <a:lstStyle/>
                     <a:p>
-                      <a:pPr algn="ctr" indent="0" marL="0">
+                      <a:pPr marL="0" indent="0" algn="ctr">
                         <a:buNone/>
                       </a:pPr>
                       <a:endParaRPr lang="en-US" sz="1150" dirty="0">
@@ -4825,7 +4644,7 @@
                     <a:bodyPr/>
                     <a:lstStyle/>
                     <a:p>
-                      <a:pPr algn="ctr" indent="0" marL="0">
+                      <a:pPr marL="0" indent="0" algn="ctr">
                         <a:buNone/>
                       </a:pPr>
                       <a:endParaRPr lang="en-US" sz="1150" dirty="0">
@@ -4877,6 +4696,11 @@
                     </a:solidFill>
                   </a:tcPr>
                 </a:tc>
+                <a:extLst>
+                  <a:ext uri="{0D108BD9-81ED-4DB2-BD59-A6C34878D82A}">
+                    <a16:rowId xmlns:a16="http://schemas.microsoft.com/office/drawing/2014/main" val="10003"/>
+                  </a:ext>
+                </a:extLst>
               </a:tr>
               <a:tr h="402336">
                 <a:tc>
@@ -4884,7 +4708,7 @@
                     <a:bodyPr/>
                     <a:lstStyle/>
                     <a:p>
-                      <a:pPr algn="ctr" indent="0" marL="0">
+                      <a:pPr marL="0" indent="0" algn="ctr">
                         <a:buNone/>
                       </a:pPr>
                       <a:r>
@@ -4952,7 +4776,7 @@
                     <a:bodyPr/>
                     <a:lstStyle/>
                     <a:p>
-                      <a:pPr algn="ctr" indent="0" marL="0">
+                      <a:pPr marL="0" indent="0" algn="ctr">
                         <a:buNone/>
                       </a:pPr>
                       <a:endParaRPr lang="en-US" sz="1150" dirty="0">
@@ -5009,7 +4833,7 @@
                     <a:bodyPr/>
                     <a:lstStyle/>
                     <a:p>
-                      <a:pPr algn="ctr" indent="0" marL="0">
+                      <a:pPr marL="0" indent="0" algn="ctr">
                         <a:buNone/>
                       </a:pPr>
                       <a:endParaRPr lang="en-US" sz="1150" dirty="0">
@@ -5066,7 +4890,7 @@
                     <a:bodyPr/>
                     <a:lstStyle/>
                     <a:p>
-                      <a:pPr algn="ctr" indent="0" marL="0">
+                      <a:pPr marL="0" indent="0" algn="ctr">
                         <a:buNone/>
                       </a:pPr>
                       <a:endParaRPr lang="en-US" sz="1150" dirty="0">
@@ -5118,6 +4942,11 @@
                     </a:solidFill>
                   </a:tcPr>
                 </a:tc>
+                <a:extLst>
+                  <a:ext uri="{0D108BD9-81ED-4DB2-BD59-A6C34878D82A}">
+                    <a16:rowId xmlns:a16="http://schemas.microsoft.com/office/drawing/2014/main" val="10004"/>
+                  </a:ext>
+                </a:extLst>
               </a:tr>
               <a:tr h="402336">
                 <a:tc>
@@ -5125,7 +4954,7 @@
                     <a:bodyPr/>
                     <a:lstStyle/>
                     <a:p>
-                      <a:pPr algn="ctr" indent="0" marL="0">
+                      <a:pPr marL="0" indent="0" algn="ctr">
                         <a:buNone/>
                       </a:pPr>
                       <a:r>
@@ -5193,7 +5022,7 @@
                     <a:bodyPr/>
                     <a:lstStyle/>
                     <a:p>
-                      <a:pPr algn="ctr" indent="0" marL="0">
+                      <a:pPr marL="0" indent="0" algn="ctr">
                         <a:buNone/>
                       </a:pPr>
                       <a:endParaRPr lang="en-US" sz="1150" dirty="0">
@@ -5250,7 +5079,7 @@
                     <a:bodyPr/>
                     <a:lstStyle/>
                     <a:p>
-                      <a:pPr algn="ctr" indent="0" marL="0">
+                      <a:pPr marL="0" indent="0" algn="ctr">
                         <a:buNone/>
                       </a:pPr>
                       <a:endParaRPr lang="en-US" sz="1150" dirty="0">
@@ -5307,7 +5136,7 @@
                     <a:bodyPr/>
                     <a:lstStyle/>
                     <a:p>
-                      <a:pPr algn="ctr" indent="0" marL="0">
+                      <a:pPr marL="0" indent="0" algn="ctr">
                         <a:buNone/>
                       </a:pPr>
                       <a:endParaRPr lang="en-US" sz="1150" dirty="0">
@@ -5359,6 +5188,11 @@
                     </a:solidFill>
                   </a:tcPr>
                 </a:tc>
+                <a:extLst>
+                  <a:ext uri="{0D108BD9-81ED-4DB2-BD59-A6C34878D82A}">
+                    <a16:rowId xmlns:a16="http://schemas.microsoft.com/office/drawing/2014/main" val="10005"/>
+                  </a:ext>
+                </a:extLst>
               </a:tr>
               <a:tr h="402336">
                 <a:tc>
@@ -5366,7 +5200,7 @@
                     <a:bodyPr/>
                     <a:lstStyle/>
                     <a:p>
-                      <a:pPr algn="ctr" indent="0" marL="0">
+                      <a:pPr marL="0" indent="0" algn="ctr">
                         <a:buNone/>
                       </a:pPr>
                       <a:r>
@@ -5434,7 +5268,7 @@
                     <a:bodyPr/>
                     <a:lstStyle/>
                     <a:p>
-                      <a:pPr algn="ctr" indent="0" marL="0">
+                      <a:pPr marL="0" indent="0" algn="ctr">
                         <a:buNone/>
                       </a:pPr>
                       <a:endParaRPr lang="en-US" sz="1150" dirty="0">
@@ -5491,7 +5325,7 @@
                     <a:bodyPr/>
                     <a:lstStyle/>
                     <a:p>
-                      <a:pPr algn="ctr" indent="0" marL="0">
+                      <a:pPr marL="0" indent="0" algn="ctr">
                         <a:buNone/>
                       </a:pPr>
                       <a:endParaRPr lang="en-US" sz="1150" dirty="0">
@@ -5548,7 +5382,7 @@
                     <a:bodyPr/>
                     <a:lstStyle/>
                     <a:p>
-                      <a:pPr algn="ctr" indent="0" marL="0">
+                      <a:pPr marL="0" indent="0" algn="ctr">
                         <a:buNone/>
                       </a:pPr>
                       <a:endParaRPr lang="en-US" sz="1150" dirty="0">
@@ -5600,6 +5434,11 @@
                     </a:solidFill>
                   </a:tcPr>
                 </a:tc>
+                <a:extLst>
+                  <a:ext uri="{0D108BD9-81ED-4DB2-BD59-A6C34878D82A}">
+                    <a16:rowId xmlns:a16="http://schemas.microsoft.com/office/drawing/2014/main" val="10006"/>
+                  </a:ext>
+                </a:extLst>
               </a:tr>
             </a:tbl>
           </a:graphicData>
@@ -5680,7 +5519,7 @@
           <a:bodyPr wrap="square" lIns="0" tIns="0" rIns="0" bIns="0" rtlCol="0" anchor="ctr"/>
           <a:lstStyle/>
           <a:p>
-            <a:pPr indent="0" marL="0">
+            <a:pPr marL="0" indent="0">
               <a:buNone/>
             </a:pPr>
             <a:r>
@@ -5746,7 +5585,7 @@
           <a:bodyPr wrap="square" lIns="0" tIns="0" rIns="0" bIns="0" rtlCol="0" anchor="ctr"/>
           <a:lstStyle/>
           <a:p>
-            <a:pPr algn="l" indent="0" marL="0">
+            <a:pPr marL="0" indent="0" algn="l">
               <a:lnSpc>
                 <a:spcPct val="114000"/>
               </a:lnSpc>
@@ -5766,7 +5605,7 @@
             <a:endParaRPr lang="en-US" sz="1100" dirty="0"/>
           </a:p>
           <a:p>
-            <a:pPr algn="l" indent="0" marL="0">
+            <a:pPr marL="0" indent="0" algn="l">
               <a:lnSpc>
                 <a:spcPct val="114000"/>
               </a:lnSpc>
@@ -5862,7 +5701,7 @@
           <a:bodyPr wrap="square" lIns="0" tIns="0" rIns="0" bIns="0" rtlCol="0" anchor="ctr"/>
           <a:lstStyle/>
           <a:p>
-            <a:pPr indent="0" marL="0">
+            <a:pPr marL="0" indent="0">
               <a:buNone/>
             </a:pPr>
             <a:r>
@@ -5928,7 +5767,7 @@
           <a:bodyPr wrap="square" lIns="0" tIns="0" rIns="0" bIns="0" rtlCol="0" anchor="ctr"/>
           <a:lstStyle/>
           <a:p>
-            <a:pPr algn="l" indent="0" marL="0">
+            <a:pPr marL="0" indent="0" algn="l">
               <a:lnSpc>
                 <a:spcPct val="114000"/>
               </a:lnSpc>
@@ -5948,7 +5787,7 @@
             <a:endParaRPr lang="en-US" sz="1050" dirty="0"/>
           </a:p>
           <a:p>
-            <a:pPr algn="l" indent="0" marL="0">
+            <a:pPr marL="0" indent="0" algn="l">
               <a:lnSpc>
                 <a:spcPct val="114000"/>
               </a:lnSpc>
@@ -5968,7 +5807,7 @@
             <a:endParaRPr lang="en-US" sz="1050" dirty="0"/>
           </a:p>
           <a:p>
-            <a:pPr algn="l" indent="0" marL="0">
+            <a:pPr marL="0" indent="0" algn="l">
               <a:lnSpc>
                 <a:spcPct val="114000"/>
               </a:lnSpc>
@@ -6064,7 +5903,7 @@
           <a:bodyPr wrap="square" lIns="0" tIns="0" rIns="0" bIns="0" rtlCol="0" anchor="ctr"/>
           <a:lstStyle/>
           <a:p>
-            <a:pPr indent="0" marL="0">
+            <a:pPr marL="0" indent="0">
               <a:buNone/>
             </a:pPr>
             <a:r>
@@ -6103,7 +5942,7 @@
           <a:bodyPr wrap="square" lIns="0" tIns="0" rIns="0" bIns="0" rtlCol="0" anchor="t"/>
           <a:lstStyle/>
           <a:p>
-            <a:pPr algn="l" indent="0" marL="0">
+            <a:pPr marL="0" indent="0" algn="l">
               <a:lnSpc>
                 <a:spcPct val="108000"/>
               </a:lnSpc>
@@ -6140,6 +5979,7 @@
         <a:solidFill>
           <a:srgbClr val="F5F7FB"/>
         </a:solidFill>
+        <a:effectLst/>
       </p:bgPr>
     </p:bg>
     <p:spTree>
@@ -6204,11 +6044,11 @@
           <a:bodyPr wrap="square" lIns="0" tIns="0" rIns="0" bIns="0" rtlCol="0" anchor="ctr"/>
           <a:lstStyle/>
           <a:p>
-            <a:pPr algn="ctr" indent="0" marL="0">
+            <a:pPr marL="0" indent="0" algn="ctr">
               <a:buNone/>
             </a:pPr>
             <a:r>
-              <a:rPr lang="en-US" sz="1150" b="1" spc="100" kern="0" dirty="0">
+              <a:rPr lang="en-US" sz="1150" b="1" kern="0" spc="100" dirty="0">
                 <a:solidFill>
                   <a:srgbClr val="FFFFFF"/>
                 </a:solidFill>
@@ -6243,7 +6083,7 @@
           <a:bodyPr wrap="square" lIns="0" tIns="0" rIns="0" bIns="0" rtlCol="0" anchor="ctr"/>
           <a:lstStyle/>
           <a:p>
-            <a:pPr indent="0" marL="0">
+            <a:pPr marL="0" indent="0">
               <a:buNone/>
             </a:pPr>
             <a:r>
@@ -6282,7 +6122,7 @@
           <a:bodyPr wrap="square" lIns="0" tIns="0" rIns="0" bIns="0" rtlCol="0" anchor="ctr"/>
           <a:lstStyle/>
           <a:p>
-            <a:pPr indent="0" marL="0">
+            <a:pPr marL="0" indent="0">
               <a:buNone/>
             </a:pPr>
             <a:r>
@@ -6323,9 +6163,27 @@
             <a:tbl>
               <a:tblPr/>
               <a:tblGrid>
-                <a:gridCol w="2011680"/>
-                <a:gridCol w="2377440"/>
-                <a:gridCol w="1463040"/>
+                <a:gridCol w="2011680">
+                  <a:extLst>
+                    <a:ext uri="{9D8B030D-6E8A-4147-A177-3AD203B41FA5}">
+                      <a16:colId xmlns:a16="http://schemas.microsoft.com/office/drawing/2014/main" val="20000"/>
+                    </a:ext>
+                  </a:extLst>
+                </a:gridCol>
+                <a:gridCol w="2377440">
+                  <a:extLst>
+                    <a:ext uri="{9D8B030D-6E8A-4147-A177-3AD203B41FA5}">
+                      <a16:colId xmlns:a16="http://schemas.microsoft.com/office/drawing/2014/main" val="20001"/>
+                    </a:ext>
+                  </a:extLst>
+                </a:gridCol>
+                <a:gridCol w="1463040">
+                  <a:extLst>
+                    <a:ext uri="{9D8B030D-6E8A-4147-A177-3AD203B41FA5}">
+                      <a16:colId xmlns:a16="http://schemas.microsoft.com/office/drawing/2014/main" val="20002"/>
+                    </a:ext>
+                  </a:extLst>
+                </a:gridCol>
               </a:tblGrid>
               <a:tr h="457200">
                 <a:tc>
@@ -6333,7 +6191,7 @@
                     <a:bodyPr/>
                     <a:lstStyle/>
                     <a:p>
-                      <a:pPr indent="0" marL="0">
+                      <a:pPr marL="0" indent="0">
                         <a:buNone/>
                       </a:pPr>
                       <a:r>
@@ -6401,7 +6259,7 @@
                     <a:bodyPr/>
                     <a:lstStyle/>
                     <a:p>
-                      <a:pPr indent="0" marL="0">
+                      <a:pPr marL="0" indent="0">
                         <a:buNone/>
                       </a:pPr>
                       <a:r>
@@ -6469,7 +6327,7 @@
                     <a:bodyPr/>
                     <a:lstStyle/>
                     <a:p>
-                      <a:pPr indent="0" marL="0">
+                      <a:pPr marL="0" indent="0">
                         <a:buNone/>
                       </a:pPr>
                       <a:r>
@@ -6532,6 +6390,11 @@
                     </a:solidFill>
                   </a:tcPr>
                 </a:tc>
+                <a:extLst>
+                  <a:ext uri="{0D108BD9-81ED-4DB2-BD59-A6C34878D82A}">
+                    <a16:rowId xmlns:a16="http://schemas.microsoft.com/office/drawing/2014/main" val="10000"/>
+                  </a:ext>
+                </a:extLst>
               </a:tr>
               <a:tr h="457200">
                 <a:tc>
@@ -6539,7 +6402,7 @@
                     <a:bodyPr/>
                     <a:lstStyle/>
                     <a:p>
-                      <a:pPr algn="ctr" indent="0" marL="0">
+                      <a:pPr marL="0" indent="0" algn="ctr">
                         <a:buNone/>
                       </a:pPr>
                       <a:endParaRPr lang="en-US" sz="1150" dirty="0">
@@ -6596,7 +6459,7 @@
                     <a:bodyPr/>
                     <a:lstStyle/>
                     <a:p>
-                      <a:pPr algn="ctr" indent="0" marL="0">
+                      <a:pPr marL="0" indent="0" algn="ctr">
                         <a:buNone/>
                       </a:pPr>
                       <a:endParaRPr lang="en-US" sz="1150" dirty="0">
@@ -6653,7 +6516,7 @@
                     <a:bodyPr/>
                     <a:lstStyle/>
                     <a:p>
-                      <a:pPr algn="ctr" indent="0" marL="0">
+                      <a:pPr marL="0" indent="0" algn="ctr">
                         <a:buNone/>
                       </a:pPr>
                       <a:endParaRPr lang="en-US" sz="1150" dirty="0">
@@ -6705,6 +6568,11 @@
                     </a:solidFill>
                   </a:tcPr>
                 </a:tc>
+                <a:extLst>
+                  <a:ext uri="{0D108BD9-81ED-4DB2-BD59-A6C34878D82A}">
+                    <a16:rowId xmlns:a16="http://schemas.microsoft.com/office/drawing/2014/main" val="10001"/>
+                  </a:ext>
+                </a:extLst>
               </a:tr>
               <a:tr h="457200">
                 <a:tc>
@@ -6712,7 +6580,7 @@
                     <a:bodyPr/>
                     <a:lstStyle/>
                     <a:p>
-                      <a:pPr algn="ctr" indent="0" marL="0">
+                      <a:pPr marL="0" indent="0" algn="ctr">
                         <a:buNone/>
                       </a:pPr>
                       <a:endParaRPr lang="en-US" sz="1150" dirty="0">
@@ -6769,7 +6637,7 @@
                     <a:bodyPr/>
                     <a:lstStyle/>
                     <a:p>
-                      <a:pPr algn="ctr" indent="0" marL="0">
+                      <a:pPr marL="0" indent="0" algn="ctr">
                         <a:buNone/>
                       </a:pPr>
                       <a:endParaRPr lang="en-US" sz="1150" dirty="0">
@@ -6826,7 +6694,7 @@
                     <a:bodyPr/>
                     <a:lstStyle/>
                     <a:p>
-                      <a:pPr algn="ctr" indent="0" marL="0">
+                      <a:pPr marL="0" indent="0" algn="ctr">
                         <a:buNone/>
                       </a:pPr>
                       <a:endParaRPr lang="en-US" sz="1150" dirty="0">
@@ -6878,6 +6746,11 @@
                     </a:solidFill>
                   </a:tcPr>
                 </a:tc>
+                <a:extLst>
+                  <a:ext uri="{0D108BD9-81ED-4DB2-BD59-A6C34878D82A}">
+                    <a16:rowId xmlns:a16="http://schemas.microsoft.com/office/drawing/2014/main" val="10002"/>
+                  </a:ext>
+                </a:extLst>
               </a:tr>
               <a:tr h="457200">
                 <a:tc>
@@ -6885,7 +6758,7 @@
                     <a:bodyPr/>
                     <a:lstStyle/>
                     <a:p>
-                      <a:pPr algn="ctr" indent="0" marL="0">
+                      <a:pPr marL="0" indent="0" algn="ctr">
                         <a:buNone/>
                       </a:pPr>
                       <a:endParaRPr lang="en-US" sz="1150" dirty="0">
@@ -6942,7 +6815,7 @@
                     <a:bodyPr/>
                     <a:lstStyle/>
                     <a:p>
-                      <a:pPr algn="ctr" indent="0" marL="0">
+                      <a:pPr marL="0" indent="0" algn="ctr">
                         <a:buNone/>
                       </a:pPr>
                       <a:endParaRPr lang="en-US" sz="1150" dirty="0">
@@ -6999,7 +6872,7 @@
                     <a:bodyPr/>
                     <a:lstStyle/>
                     <a:p>
-                      <a:pPr algn="ctr" indent="0" marL="0">
+                      <a:pPr marL="0" indent="0" algn="ctr">
                         <a:buNone/>
                       </a:pPr>
                       <a:endParaRPr lang="en-US" sz="1150" dirty="0">
@@ -7051,6 +6924,11 @@
                     </a:solidFill>
                   </a:tcPr>
                 </a:tc>
+                <a:extLst>
+                  <a:ext uri="{0D108BD9-81ED-4DB2-BD59-A6C34878D82A}">
+                    <a16:rowId xmlns:a16="http://schemas.microsoft.com/office/drawing/2014/main" val="10003"/>
+                  </a:ext>
+                </a:extLst>
               </a:tr>
             </a:tbl>
           </a:graphicData>
@@ -7077,7 +6955,7 @@
           <a:bodyPr wrap="square" lIns="0" tIns="0" rIns="0" bIns="0" rtlCol="0" anchor="t"/>
           <a:lstStyle/>
           <a:p>
-            <a:pPr algn="ctr" indent="0" marL="0">
+            <a:pPr marL="0" indent="0" algn="ctr">
               <a:lnSpc>
                 <a:spcPct val="108000"/>
               </a:lnSpc>
@@ -7173,7 +7051,7 @@
           <a:bodyPr wrap="square" lIns="0" tIns="0" rIns="0" bIns="0" rtlCol="0" anchor="ctr"/>
           <a:lstStyle/>
           <a:p>
-            <a:pPr indent="0" marL="0">
+            <a:pPr marL="0" indent="0">
               <a:buNone/>
             </a:pPr>
             <a:r>
@@ -7239,7 +7117,7 @@
           <a:bodyPr wrap="square" lIns="0" tIns="0" rIns="0" bIns="0" rtlCol="0" anchor="ctr"/>
           <a:lstStyle/>
           <a:p>
-            <a:pPr algn="l" indent="0" marL="0">
+            <a:pPr marL="0" indent="0" algn="l">
               <a:lnSpc>
                 <a:spcPct val="114000"/>
               </a:lnSpc>
@@ -7259,7 +7137,7 @@
             <a:endParaRPr lang="en-US" sz="1100" dirty="0"/>
           </a:p>
           <a:p>
-            <a:pPr algn="l" indent="0" marL="0">
+            <a:pPr marL="0" indent="0" algn="l">
               <a:lnSpc>
                 <a:spcPct val="114000"/>
               </a:lnSpc>
@@ -7268,7 +7146,7 @@
             <a:endParaRPr lang="en-US" sz="1100" dirty="0"/>
           </a:p>
           <a:p>
-            <a:pPr algn="l" indent="0" marL="0">
+            <a:pPr marL="0" indent="0" algn="l">
               <a:lnSpc>
                 <a:spcPct val="114000"/>
               </a:lnSpc>
@@ -7288,7 +7166,7 @@
             <a:endParaRPr lang="en-US" sz="1100" dirty="0"/>
           </a:p>
           <a:p>
-            <a:pPr algn="l" indent="0" marL="0">
+            <a:pPr marL="0" indent="0" algn="l">
               <a:lnSpc>
                 <a:spcPct val="114000"/>
               </a:lnSpc>
@@ -7357,7 +7235,7 @@
           <a:bodyPr wrap="square" lIns="0" tIns="0" rIns="0" bIns="0" rtlCol="0" anchor="ctr"/>
           <a:lstStyle/>
           <a:p>
-            <a:pPr algn="ctr" indent="0" marL="0">
+            <a:pPr marL="0" indent="0" algn="ctr">
               <a:lnSpc>
                 <a:spcPct val="108000"/>
               </a:lnSpc>
@@ -7426,7 +7304,7 @@
           <a:bodyPr wrap="square" lIns="0" tIns="0" rIns="0" bIns="0" rtlCol="0" anchor="ctr"/>
           <a:lstStyle/>
           <a:p>
-            <a:pPr algn="l" indent="0" marL="0">
+            <a:pPr marL="0" indent="0" algn="l">
               <a:lnSpc>
                 <a:spcPct val="106000"/>
               </a:lnSpc>
@@ -7463,6 +7341,7 @@
         <a:solidFill>
           <a:srgbClr val="F5F7FB"/>
         </a:solidFill>
+        <a:effectLst/>
       </p:bgPr>
     </p:bg>
     <p:spTree>
@@ -7527,11 +7406,11 @@
           <a:bodyPr wrap="square" lIns="0" tIns="0" rIns="0" bIns="0" rtlCol="0" anchor="ctr"/>
           <a:lstStyle/>
           <a:p>
-            <a:pPr algn="ctr" indent="0" marL="0">
+            <a:pPr marL="0" indent="0" algn="ctr">
               <a:buNone/>
             </a:pPr>
             <a:r>
-              <a:rPr lang="en-US" sz="1150" b="1" spc="100" kern="0" dirty="0">
+              <a:rPr lang="en-US" sz="1150" b="1" kern="0" spc="100" dirty="0">
                 <a:solidFill>
                   <a:srgbClr val="FFFFFF"/>
                 </a:solidFill>
@@ -7566,7 +7445,7 @@
           <a:bodyPr wrap="square" lIns="0" tIns="0" rIns="0" bIns="0" rtlCol="0" anchor="ctr"/>
           <a:lstStyle/>
           <a:p>
-            <a:pPr indent="0" marL="0">
+            <a:pPr marL="0" indent="0">
               <a:buNone/>
             </a:pPr>
             <a:r>
@@ -7605,7 +7484,7 @@
           <a:bodyPr wrap="square" lIns="0" tIns="0" rIns="0" bIns="0" rtlCol="0" anchor="ctr"/>
           <a:lstStyle/>
           <a:p>
-            <a:pPr indent="0" marL="0">
+            <a:pPr marL="0" indent="0">
               <a:buNone/>
             </a:pPr>
             <a:r>
@@ -7698,7 +7577,7 @@
           <a:bodyPr wrap="square" lIns="0" tIns="0" rIns="0" bIns="0" rtlCol="0" anchor="ctr"/>
           <a:lstStyle/>
           <a:p>
-            <a:pPr indent="0" marL="0">
+            <a:pPr marL="0" indent="0">
               <a:buNone/>
             </a:pPr>
             <a:r>
@@ -7764,7 +7643,7 @@
           <a:bodyPr wrap="square" lIns="0" tIns="0" rIns="0" bIns="0" rtlCol="0" anchor="ctr"/>
           <a:lstStyle/>
           <a:p>
-            <a:pPr algn="ctr" indent="0" marL="0">
+            <a:pPr marL="0" indent="0" algn="ctr">
               <a:lnSpc>
                 <a:spcPct val="114000"/>
               </a:lnSpc>
@@ -7833,7 +7712,7 @@
           <a:bodyPr wrap="square" lIns="0" tIns="0" rIns="0" bIns="0" rtlCol="0" anchor="ctr"/>
           <a:lstStyle/>
           <a:p>
-            <a:pPr algn="l" indent="0" marL="0">
+            <a:pPr marL="0" indent="0" algn="l">
               <a:lnSpc>
                 <a:spcPct val="114000"/>
               </a:lnSpc>
@@ -7853,7 +7732,7 @@
             <a:endParaRPr lang="en-US" sz="1100" dirty="0"/>
           </a:p>
           <a:p>
-            <a:pPr algn="l" indent="0" marL="0">
+            <a:pPr marL="0" indent="0" algn="l">
               <a:lnSpc>
                 <a:spcPct val="114000"/>
               </a:lnSpc>
@@ -7949,7 +7828,7 @@
           <a:bodyPr wrap="square" lIns="0" tIns="0" rIns="0" bIns="0" rtlCol="0" anchor="ctr"/>
           <a:lstStyle/>
           <a:p>
-            <a:pPr indent="0" marL="0">
+            <a:pPr marL="0" indent="0">
               <a:buNone/>
             </a:pPr>
             <a:r>
@@ -8015,7 +7894,7 @@
           <a:bodyPr wrap="square" lIns="0" tIns="0" rIns="0" bIns="0" rtlCol="0" anchor="ctr"/>
           <a:lstStyle/>
           <a:p>
-            <a:pPr algn="l" indent="0" marL="0">
+            <a:pPr marL="0" indent="0" algn="l">
               <a:lnSpc>
                 <a:spcPct val="114000"/>
               </a:lnSpc>
@@ -8035,7 +7914,7 @@
             <a:endParaRPr lang="en-US" sz="1100" dirty="0"/>
           </a:p>
           <a:p>
-            <a:pPr algn="l" indent="0" marL="0">
+            <a:pPr marL="0" indent="0" algn="l">
               <a:lnSpc>
                 <a:spcPct val="114000"/>
               </a:lnSpc>
@@ -8055,7 +7934,7 @@
             <a:endParaRPr lang="en-US" sz="1100" dirty="0"/>
           </a:p>
           <a:p>
-            <a:pPr algn="l" indent="0" marL="0">
+            <a:pPr marL="0" indent="0" algn="l">
               <a:lnSpc>
                 <a:spcPct val="114000"/>
               </a:lnSpc>
@@ -8075,7 +7954,7 @@
             <a:endParaRPr lang="en-US" sz="1100" dirty="0"/>
           </a:p>
           <a:p>
-            <a:pPr algn="l" indent="0" marL="0">
+            <a:pPr marL="0" indent="0" algn="l">
               <a:lnSpc>
                 <a:spcPct val="114000"/>
               </a:lnSpc>
@@ -8084,7 +7963,7 @@
             <a:endParaRPr lang="en-US" sz="1100" dirty="0"/>
           </a:p>
           <a:p>
-            <a:pPr algn="l" indent="0" marL="0">
+            <a:pPr marL="0" indent="0" algn="l">
               <a:lnSpc>
                 <a:spcPct val="114000"/>
               </a:lnSpc>
@@ -8180,7 +8059,7 @@
           <a:bodyPr wrap="square" lIns="0" tIns="0" rIns="0" bIns="0" rtlCol="0" anchor="ctr"/>
           <a:lstStyle/>
           <a:p>
-            <a:pPr indent="0" marL="0">
+            <a:pPr marL="0" indent="0">
               <a:buNone/>
             </a:pPr>
             <a:r>
@@ -8246,7 +8125,7 @@
           <a:bodyPr wrap="square" lIns="0" tIns="0" rIns="0" bIns="0" rtlCol="0" anchor="ctr"/>
           <a:lstStyle/>
           <a:p>
-            <a:pPr algn="l" indent="0" marL="0">
+            <a:pPr marL="0" indent="0" algn="l">
               <a:lnSpc>
                 <a:spcPct val="114000"/>
               </a:lnSpc>
@@ -8315,7 +8194,7 @@
           <a:bodyPr wrap="square" lIns="0" tIns="0" rIns="0" bIns="0" rtlCol="0" anchor="ctr"/>
           <a:lstStyle/>
           <a:p>
-            <a:pPr algn="l" indent="0" marL="0">
+            <a:pPr marL="0" indent="0" algn="l">
               <a:lnSpc>
                 <a:spcPct val="114000"/>
               </a:lnSpc>
@@ -8384,7 +8263,7 @@
           <a:bodyPr wrap="square" lIns="0" tIns="0" rIns="0" bIns="0" rtlCol="0" anchor="ctr"/>
           <a:lstStyle/>
           <a:p>
-            <a:pPr algn="l" indent="0" marL="0">
+            <a:pPr marL="0" indent="0" algn="l">
               <a:lnSpc>
                 <a:spcPct val="114000"/>
               </a:lnSpc>
@@ -8421,6 +8300,7 @@
         <a:solidFill>
           <a:srgbClr val="F5F7FB"/>
         </a:solidFill>
+        <a:effectLst/>
       </p:bgPr>
     </p:bg>
     <p:spTree>
@@ -8485,11 +8365,11 @@
           <a:bodyPr wrap="square" lIns="0" tIns="0" rIns="0" bIns="0" rtlCol="0" anchor="ctr"/>
           <a:lstStyle/>
           <a:p>
-            <a:pPr algn="ctr" indent="0" marL="0">
+            <a:pPr marL="0" indent="0" algn="ctr">
               <a:buNone/>
             </a:pPr>
             <a:r>
-              <a:rPr lang="en-US" sz="1150" b="1" spc="100" kern="0" dirty="0">
+              <a:rPr lang="en-US" sz="1150" b="1" kern="0" spc="100" dirty="0">
                 <a:solidFill>
                   <a:srgbClr val="FFFFFF"/>
                 </a:solidFill>
@@ -8524,7 +8404,7 @@
           <a:bodyPr wrap="square" lIns="0" tIns="0" rIns="0" bIns="0" rtlCol="0" anchor="ctr"/>
           <a:lstStyle/>
           <a:p>
-            <a:pPr indent="0" marL="0">
+            <a:pPr marL="0" indent="0">
               <a:buNone/>
             </a:pPr>
             <a:r>
@@ -8563,7 +8443,7 @@
           <a:bodyPr wrap="square" lIns="0" tIns="0" rIns="0" bIns="0" rtlCol="0" anchor="ctr"/>
           <a:lstStyle/>
           <a:p>
-            <a:pPr indent="0" marL="0">
+            <a:pPr marL="0" indent="0">
               <a:buNone/>
             </a:pPr>
             <a:r>
@@ -8656,11 +8536,11 @@
           <a:bodyPr wrap="square" lIns="0" tIns="0" rIns="0" bIns="0" rtlCol="0" anchor="ctr"/>
           <a:lstStyle/>
           <a:p>
-            <a:pPr algn="ctr" indent="0" marL="0">
+            <a:pPr marL="0" indent="0" algn="ctr">
               <a:buNone/>
             </a:pPr>
             <a:r>
-              <a:rPr lang="en-US" sz="1250" b="1" spc="100" kern="0" dirty="0">
+              <a:rPr lang="en-US" sz="1250" b="1" kern="0" spc="100" dirty="0">
                 <a:solidFill>
                   <a:srgbClr val="FFFFFF"/>
                 </a:solidFill>
@@ -8695,7 +8575,7 @@
           <a:bodyPr wrap="square" lIns="0" tIns="0" rIns="0" bIns="0" rtlCol="0" anchor="ctr"/>
           <a:lstStyle/>
           <a:p>
-            <a:pPr indent="0" marL="0">
+            <a:pPr marL="0" indent="0">
               <a:buNone/>
             </a:pPr>
             <a:r>
@@ -8734,7 +8614,7 @@
           <a:bodyPr wrap="square" lIns="0" tIns="0" rIns="0" bIns="0" rtlCol="0" anchor="ctr"/>
           <a:lstStyle/>
           <a:p>
-            <a:pPr algn="l" indent="0" marL="0">
+            <a:pPr marL="0" indent="0" algn="l">
               <a:lnSpc>
                 <a:spcPct val="108000"/>
               </a:lnSpc>
@@ -8830,11 +8710,11 @@
           <a:bodyPr wrap="square" lIns="0" tIns="0" rIns="0" bIns="0" rtlCol="0" anchor="ctr"/>
           <a:lstStyle/>
           <a:p>
-            <a:pPr algn="ctr" indent="0" marL="0">
+            <a:pPr marL="0" indent="0" algn="ctr">
               <a:buNone/>
             </a:pPr>
             <a:r>
-              <a:rPr lang="en-US" sz="1250" b="1" spc="100" kern="0" dirty="0">
+              <a:rPr lang="en-US" sz="1250" b="1" kern="0" spc="100" dirty="0">
                 <a:solidFill>
                   <a:srgbClr val="FFFFFF"/>
                 </a:solidFill>
@@ -8869,7 +8749,7 @@
           <a:bodyPr wrap="square" lIns="0" tIns="0" rIns="0" bIns="0" rtlCol="0" anchor="ctr"/>
           <a:lstStyle/>
           <a:p>
-            <a:pPr indent="0" marL="0">
+            <a:pPr marL="0" indent="0">
               <a:buNone/>
             </a:pPr>
             <a:r>
@@ -8908,7 +8788,7 @@
           <a:bodyPr wrap="square" lIns="0" tIns="0" rIns="0" bIns="0" rtlCol="0" anchor="ctr"/>
           <a:lstStyle/>
           <a:p>
-            <a:pPr algn="l" indent="0" marL="0">
+            <a:pPr marL="0" indent="0" algn="l">
               <a:lnSpc>
                 <a:spcPct val="108000"/>
               </a:lnSpc>
@@ -9004,11 +8884,11 @@
           <a:bodyPr wrap="square" lIns="0" tIns="0" rIns="0" bIns="0" rtlCol="0" anchor="ctr"/>
           <a:lstStyle/>
           <a:p>
-            <a:pPr algn="ctr" indent="0" marL="0">
+            <a:pPr marL="0" indent="0" algn="ctr">
               <a:buNone/>
             </a:pPr>
             <a:r>
-              <a:rPr lang="en-US" sz="1250" b="1" spc="100" kern="0" dirty="0">
+              <a:rPr lang="en-US" sz="1250" b="1" kern="0" spc="100" dirty="0">
                 <a:solidFill>
                   <a:srgbClr val="FFFFFF"/>
                 </a:solidFill>
@@ -9043,7 +8923,7 @@
           <a:bodyPr wrap="square" lIns="0" tIns="0" rIns="0" bIns="0" rtlCol="0" anchor="ctr"/>
           <a:lstStyle/>
           <a:p>
-            <a:pPr indent="0" marL="0">
+            <a:pPr marL="0" indent="0">
               <a:buNone/>
             </a:pPr>
             <a:r>
@@ -9082,7 +8962,7 @@
           <a:bodyPr wrap="square" lIns="0" tIns="0" rIns="0" bIns="0" rtlCol="0" anchor="ctr"/>
           <a:lstStyle/>
           <a:p>
-            <a:pPr algn="l" indent="0" marL="0">
+            <a:pPr marL="0" indent="0" algn="l">
               <a:lnSpc>
                 <a:spcPct val="108000"/>
               </a:lnSpc>
@@ -9178,11 +9058,11 @@
           <a:bodyPr wrap="square" lIns="0" tIns="0" rIns="0" bIns="0" rtlCol="0" anchor="ctr"/>
           <a:lstStyle/>
           <a:p>
-            <a:pPr algn="ctr" indent="0" marL="0">
+            <a:pPr marL="0" indent="0" algn="ctr">
               <a:buNone/>
             </a:pPr>
             <a:r>
-              <a:rPr lang="en-US" sz="1250" b="1" spc="100" kern="0" dirty="0">
+              <a:rPr lang="en-US" sz="1250" b="1" kern="0" spc="100" dirty="0">
                 <a:solidFill>
                   <a:srgbClr val="FFFFFF"/>
                 </a:solidFill>
@@ -9217,7 +9097,7 @@
           <a:bodyPr wrap="square" lIns="0" tIns="0" rIns="0" bIns="0" rtlCol="0" anchor="ctr"/>
           <a:lstStyle/>
           <a:p>
-            <a:pPr indent="0" marL="0">
+            <a:pPr marL="0" indent="0">
               <a:buNone/>
             </a:pPr>
             <a:r>
@@ -9256,7 +9136,7 @@
           <a:bodyPr wrap="square" lIns="0" tIns="0" rIns="0" bIns="0" rtlCol="0" anchor="ctr"/>
           <a:lstStyle/>
           <a:p>
-            <a:pPr algn="l" indent="0" marL="0">
+            <a:pPr marL="0" indent="0" algn="l">
               <a:lnSpc>
                 <a:spcPct val="108000"/>
               </a:lnSpc>
@@ -9352,11 +9232,11 @@
           <a:bodyPr wrap="square" lIns="0" tIns="0" rIns="0" bIns="0" rtlCol="0" anchor="ctr"/>
           <a:lstStyle/>
           <a:p>
-            <a:pPr algn="ctr" indent="0" marL="0">
+            <a:pPr marL="0" indent="0" algn="ctr">
               <a:buNone/>
             </a:pPr>
             <a:r>
-              <a:rPr lang="en-US" sz="1250" b="1" spc="100" kern="0" dirty="0">
+              <a:rPr lang="en-US" sz="1250" b="1" kern="0" spc="100" dirty="0">
                 <a:solidFill>
                   <a:srgbClr val="FFFFFF"/>
                 </a:solidFill>
@@ -9391,7 +9271,7 @@
           <a:bodyPr wrap="square" lIns="0" tIns="0" rIns="0" bIns="0" rtlCol="0" anchor="ctr"/>
           <a:lstStyle/>
           <a:p>
-            <a:pPr indent="0" marL="0">
+            <a:pPr marL="0" indent="0">
               <a:buNone/>
             </a:pPr>
             <a:r>
@@ -9430,7 +9310,7 @@
           <a:bodyPr wrap="square" lIns="0" tIns="0" rIns="0" bIns="0" rtlCol="0" anchor="ctr"/>
           <a:lstStyle/>
           <a:p>
-            <a:pPr algn="l" indent="0" marL="0">
+            <a:pPr marL="0" indent="0" algn="l">
               <a:lnSpc>
                 <a:spcPct val="108000"/>
               </a:lnSpc>
@@ -9477,45 +9357,6 @@
             <a:prstDash val="solid"/>
           </a:ln>
         </p:spPr>
-      </p:sp>
-      <p:sp>
-        <p:nvSpPr>
-          <p:cNvPr id="32" name="Text 30"/>
-          <p:cNvSpPr/>
-          <p:nvPr/>
-        </p:nvSpPr>
-        <p:spPr>
-          <a:xfrm>
-            <a:off x="548640" y="6217920"/>
-            <a:ext cx="11064240" cy="292608"/>
-          </a:xfrm>
-          <a:prstGeom prst="rect">
-            <a:avLst/>
-          </a:prstGeom>
-          <a:noFill/>
-          <a:ln/>
-        </p:spPr>
-        <p:txBody>
-          <a:bodyPr wrap="square" lIns="0" tIns="0" rIns="0" bIns="0" rtlCol="0" anchor="ctr"/>
-          <a:lstStyle/>
-          <a:p>
-            <a:pPr indent="0" marL="0">
-              <a:buNone/>
-            </a:pPr>
-            <a:r>
-              <a:rPr lang="en-US" sz="1050" i="1" dirty="0">
-                <a:solidFill>
-                  <a:srgbClr val="5B6B87"/>
-                </a:solidFill>
-                <a:latin typeface="Calibri" pitchFamily="34" charset="0"/>
-                <a:ea typeface="Calibri" pitchFamily="34" charset="-122"/>
-                <a:cs typeface="Calibri" pitchFamily="34" charset="-120"/>
-              </a:rPr>
-              <a:t>Recuerda: no se evalúa qué tan bueno es tu modelo, sino qué entendiste. La slide 4 es la que más pesa.</a:t>
-            </a:r>
-            <a:endParaRPr lang="en-US" sz="1050" dirty="0"/>
-          </a:p>
-        </p:txBody>
       </p:sp>
     </p:spTree>
   </p:cSld>
@@ -9818,4 +9659,319 @@
     </a:ext>
   </a:extLst>
 </a:theme>
+</file>
+
+<file path=ppt/theme/theme2.xml><?xml version="1.0" encoding="utf-8"?>
+<a:theme xmlns:a="http://schemas.openxmlformats.org/drawingml/2006/main" name="Office Theme">
+  <a:themeElements>
+    <a:clrScheme name="Office">
+      <a:dk1>
+        <a:sysClr val="windowText" lastClr="000000"/>
+      </a:dk1>
+      <a:lt1>
+        <a:sysClr val="window" lastClr="FFFFFF"/>
+      </a:lt1>
+      <a:dk2>
+        <a:srgbClr val="0E2841"/>
+      </a:dk2>
+      <a:lt2>
+        <a:srgbClr val="E8E8E8"/>
+      </a:lt2>
+      <a:accent1>
+        <a:srgbClr val="156082"/>
+      </a:accent1>
+      <a:accent2>
+        <a:srgbClr val="E97132"/>
+      </a:accent2>
+      <a:accent3>
+        <a:srgbClr val="196B24"/>
+      </a:accent3>
+      <a:accent4>
+        <a:srgbClr val="0F9ED5"/>
+      </a:accent4>
+      <a:accent5>
+        <a:srgbClr val="A02B93"/>
+      </a:accent5>
+      <a:accent6>
+        <a:srgbClr val="4EA72E"/>
+      </a:accent6>
+      <a:hlink>
+        <a:srgbClr val="467886"/>
+      </a:hlink>
+      <a:folHlink>
+        <a:srgbClr val="96607D"/>
+      </a:folHlink>
+    </a:clrScheme>
+    <a:fontScheme name="Office">
+      <a:majorFont>
+        <a:latin typeface="Aptos Display" panose="02110004020202020204"/>
+        <a:ea typeface=""/>
+        <a:cs typeface=""/>
+        <a:font script="Jpan" typeface="游ゴシック Light"/>
+        <a:font script="Hang" typeface="맑은 고딕"/>
+        <a:font script="Hans" typeface="等线 Light"/>
+        <a:font script="Hant" typeface="新細明體"/>
+        <a:font script="Arab" typeface="Times New Roman"/>
+        <a:font script="Hebr" typeface="Times New Roman"/>
+        <a:font script="Thai" typeface="Angsana New"/>
+        <a:font script="Ethi" typeface="Nyala"/>
+        <a:font script="Beng" typeface="Vrinda"/>
+        <a:font script="Gujr" typeface="Shruti"/>
+        <a:font script="Khmr" typeface="MoolBoran"/>
+        <a:font script="Knda" typeface="Tunga"/>
+        <a:font script="Guru" typeface="Raavi"/>
+        <a:font script="Cans" typeface="Euphemia"/>
+        <a:font script="Cher" typeface="Plantagenet Cherokee"/>
+        <a:font script="Yiii" typeface="Microsoft Yi Baiti"/>
+        <a:font script="Tibt" typeface="Microsoft Himalaya"/>
+        <a:font script="Thaa" typeface="MV Boli"/>
+        <a:font script="Deva" typeface="Mangal"/>
+        <a:font script="Telu" typeface="Gautami"/>
+        <a:font script="Taml" typeface="Latha"/>
+        <a:font script="Syrc" typeface="Estrangelo Edessa"/>
+        <a:font script="Orya" typeface="Kalinga"/>
+        <a:font script="Mlym" typeface="Kartika"/>
+        <a:font script="Laoo" typeface="DokChampa"/>
+        <a:font script="Sinh" typeface="Iskoola Pota"/>
+        <a:font script="Mong" typeface="Mongolian Baiti"/>
+        <a:font script="Viet" typeface="Times New Roman"/>
+        <a:font script="Uigh" typeface="Microsoft Uighur"/>
+        <a:font script="Geor" typeface="Sylfaen"/>
+        <a:font script="Armn" typeface="Arial"/>
+        <a:font script="Bugi" typeface="Leelawadee UI"/>
+        <a:font script="Bopo" typeface="Microsoft JhengHei"/>
+        <a:font script="Java" typeface="Javanese Text"/>
+        <a:font script="Lisu" typeface="Segoe UI"/>
+        <a:font script="Mymr" typeface="Myanmar Text"/>
+        <a:font script="Nkoo" typeface="Ebrima"/>
+        <a:font script="Olck" typeface="Nirmala UI"/>
+        <a:font script="Osma" typeface="Ebrima"/>
+        <a:font script="Phag" typeface="Phagspa"/>
+        <a:font script="Syrn" typeface="Estrangelo Edessa"/>
+        <a:font script="Syrj" typeface="Estrangelo Edessa"/>
+        <a:font script="Syre" typeface="Estrangelo Edessa"/>
+        <a:font script="Sora" typeface="Nirmala UI"/>
+        <a:font script="Tale" typeface="Microsoft Tai Le"/>
+        <a:font script="Talu" typeface="Microsoft New Tai Lue"/>
+        <a:font script="Tfng" typeface="Ebrima"/>
+      </a:majorFont>
+      <a:minorFont>
+        <a:latin typeface="Aptos" panose="02110004020202020204"/>
+        <a:ea typeface=""/>
+        <a:cs typeface=""/>
+        <a:font script="Jpan" typeface="游ゴシック"/>
+        <a:font script="Hang" typeface="맑은 고딕"/>
+        <a:font script="Hans" typeface="等线"/>
+        <a:font script="Hant" typeface="新細明體"/>
+        <a:font script="Arab" typeface="Arial"/>
+        <a:font script="Hebr" typeface="Arial"/>
+        <a:font script="Thai" typeface="Cordia New"/>
+        <a:font script="Ethi" typeface="Nyala"/>
+        <a:font script="Beng" typeface="Vrinda"/>
+        <a:font script="Gujr" typeface="Shruti"/>
+        <a:font script="Khmr" typeface="DaunPenh"/>
+        <a:font script="Knda" typeface="Tunga"/>
+        <a:font script="Guru" typeface="Raavi"/>
+        <a:font script="Cans" typeface="Euphemia"/>
+        <a:font script="Cher" typeface="Plantagenet Cherokee"/>
+        <a:font script="Yiii" typeface="Microsoft Yi Baiti"/>
+        <a:font script="Tibt" typeface="Microsoft Himalaya"/>
+        <a:font script="Thaa" typeface="MV Boli"/>
+        <a:font script="Deva" typeface="Mangal"/>
+        <a:font script="Telu" typeface="Gautami"/>
+        <a:font script="Taml" typeface="Latha"/>
+        <a:font script="Syrc" typeface="Estrangelo Edessa"/>
+        <a:font script="Orya" typeface="Kalinga"/>
+        <a:font script="Mlym" typeface="Kartika"/>
+        <a:font script="Laoo" typeface="DokChampa"/>
+        <a:font script="Sinh" typeface="Iskoola Pota"/>
+        <a:font script="Mong" typeface="Mongolian Baiti"/>
+        <a:font script="Viet" typeface="Arial"/>
+        <a:font script="Uigh" typeface="Microsoft Uighur"/>
+        <a:font script="Geor" typeface="Sylfaen"/>
+        <a:font script="Armn" typeface="Arial"/>
+        <a:font script="Bugi" typeface="Leelawadee UI"/>
+        <a:font script="Bopo" typeface="Microsoft JhengHei"/>
+        <a:font script="Java" typeface="Javanese Text"/>
+        <a:font script="Lisu" typeface="Segoe UI"/>
+        <a:font script="Mymr" typeface="Myanmar Text"/>
+        <a:font script="Nkoo" typeface="Ebrima"/>
+        <a:font script="Olck" typeface="Nirmala UI"/>
+        <a:font script="Osma" typeface="Ebrima"/>
+        <a:font script="Phag" typeface="Phagspa"/>
+        <a:font script="Syrn" typeface="Estrangelo Edessa"/>
+        <a:font script="Syrj" typeface="Estrangelo Edessa"/>
+        <a:font script="Syre" typeface="Estrangelo Edessa"/>
+        <a:font script="Sora" typeface="Nirmala UI"/>
+        <a:font script="Tale" typeface="Microsoft Tai Le"/>
+        <a:font script="Talu" typeface="Microsoft New Tai Lue"/>
+        <a:font script="Tfng" typeface="Ebrima"/>
+      </a:minorFont>
+    </a:fontScheme>
+    <a:fmtScheme name="Office">
+      <a:fillStyleLst>
+        <a:solidFill>
+          <a:schemeClr val="phClr"/>
+        </a:solidFill>
+        <a:gradFill rotWithShape="1">
+          <a:gsLst>
+            <a:gs pos="0">
+              <a:schemeClr val="phClr">
+                <a:lumMod val="110000"/>
+                <a:satMod val="105000"/>
+                <a:tint val="67000"/>
+              </a:schemeClr>
+            </a:gs>
+            <a:gs pos="50000">
+              <a:schemeClr val="phClr">
+                <a:lumMod val="105000"/>
+                <a:satMod val="103000"/>
+                <a:tint val="73000"/>
+              </a:schemeClr>
+            </a:gs>
+            <a:gs pos="100000">
+              <a:schemeClr val="phClr">
+                <a:lumMod val="105000"/>
+                <a:satMod val="109000"/>
+                <a:tint val="81000"/>
+              </a:schemeClr>
+            </a:gs>
+          </a:gsLst>
+          <a:lin ang="5400000" scaled="0"/>
+        </a:gradFill>
+        <a:gradFill rotWithShape="1">
+          <a:gsLst>
+            <a:gs pos="0">
+              <a:schemeClr val="phClr">
+                <a:satMod val="103000"/>
+                <a:lumMod val="102000"/>
+                <a:tint val="94000"/>
+              </a:schemeClr>
+            </a:gs>
+            <a:gs pos="50000">
+              <a:schemeClr val="phClr">
+                <a:satMod val="110000"/>
+                <a:lumMod val="100000"/>
+                <a:shade val="100000"/>
+              </a:schemeClr>
+            </a:gs>
+            <a:gs pos="100000">
+              <a:schemeClr val="phClr">
+                <a:lumMod val="99000"/>
+                <a:satMod val="120000"/>
+                <a:shade val="78000"/>
+              </a:schemeClr>
+            </a:gs>
+          </a:gsLst>
+          <a:lin ang="5400000" scaled="0"/>
+        </a:gradFill>
+      </a:fillStyleLst>
+      <a:lnStyleLst>
+        <a:ln w="12700" cap="flat" cmpd="sng" algn="ctr">
+          <a:solidFill>
+            <a:schemeClr val="phClr"/>
+          </a:solidFill>
+          <a:prstDash val="solid"/>
+          <a:miter lim="800000"/>
+        </a:ln>
+        <a:ln w="19050" cap="flat" cmpd="sng" algn="ctr">
+          <a:solidFill>
+            <a:schemeClr val="phClr"/>
+          </a:solidFill>
+          <a:prstDash val="solid"/>
+          <a:miter lim="800000"/>
+        </a:ln>
+        <a:ln w="25400" cap="flat" cmpd="sng" algn="ctr">
+          <a:solidFill>
+            <a:schemeClr val="phClr"/>
+          </a:solidFill>
+          <a:prstDash val="solid"/>
+          <a:miter lim="800000"/>
+        </a:ln>
+      </a:lnStyleLst>
+      <a:effectStyleLst>
+        <a:effectStyle>
+          <a:effectLst/>
+        </a:effectStyle>
+        <a:effectStyle>
+          <a:effectLst/>
+        </a:effectStyle>
+        <a:effectStyle>
+          <a:effectLst>
+            <a:outerShdw blurRad="57150" dist="19050" dir="5400000" algn="ctr" rotWithShape="0">
+              <a:srgbClr val="000000">
+                <a:alpha val="63000"/>
+              </a:srgbClr>
+            </a:outerShdw>
+          </a:effectLst>
+        </a:effectStyle>
+      </a:effectStyleLst>
+      <a:bgFillStyleLst>
+        <a:solidFill>
+          <a:schemeClr val="phClr"/>
+        </a:solidFill>
+        <a:solidFill>
+          <a:schemeClr val="phClr">
+            <a:tint val="95000"/>
+            <a:satMod val="170000"/>
+          </a:schemeClr>
+        </a:solidFill>
+        <a:gradFill rotWithShape="1">
+          <a:gsLst>
+            <a:gs pos="0">
+              <a:schemeClr val="phClr">
+                <a:tint val="93000"/>
+                <a:satMod val="150000"/>
+                <a:shade val="98000"/>
+                <a:lumMod val="102000"/>
+              </a:schemeClr>
+            </a:gs>
+            <a:gs pos="50000">
+              <a:schemeClr val="phClr">
+                <a:tint val="98000"/>
+                <a:satMod val="130000"/>
+                <a:shade val="90000"/>
+                <a:lumMod val="103000"/>
+              </a:schemeClr>
+            </a:gs>
+            <a:gs pos="100000">
+              <a:schemeClr val="phClr">
+                <a:shade val="63000"/>
+                <a:satMod val="120000"/>
+              </a:schemeClr>
+            </a:gs>
+          </a:gsLst>
+          <a:lin ang="5400000" scaled="0"/>
+        </a:gradFill>
+      </a:bgFillStyleLst>
+    </a:fmtScheme>
+  </a:themeElements>
+  <a:objectDefaults>
+    <a:lnDef>
+      <a:spPr/>
+      <a:bodyPr/>
+      <a:lstStyle/>
+      <a:style>
+        <a:lnRef idx="2">
+          <a:schemeClr val="accent1"/>
+        </a:lnRef>
+        <a:fillRef idx="0">
+          <a:schemeClr val="accent1"/>
+        </a:fillRef>
+        <a:effectRef idx="1">
+          <a:schemeClr val="accent1"/>
+        </a:effectRef>
+        <a:fontRef idx="minor">
+          <a:schemeClr val="tx1"/>
+        </a:fontRef>
+      </a:style>
+    </a:lnDef>
+  </a:objectDefaults>
+  <a:extraClrSchemeLst/>
+  <a:extLst>
+    <a:ext uri="{05A4C25C-085E-4340-85A3-A5531E510DB2}">
+      <thm15:themeFamily xmlns:thm15="http://schemas.microsoft.com/office/thememl/2012/main" name="Office Theme" id="{2E142A2C-CD16-42D6-873A-C26D2A0506FA}" vid="{1BDDFF52-6CD6-40A5-AB3C-68EB2F1E4D0A}"/>
+    </a:ext>
+  </a:extLst>
+</a:theme>
 </file>